--- a/assets/powerpoints/A1-un-probleme-dans-mon-logement.pptx
+++ b/assets/powerpoints/A1-un-probleme-dans-mon-logement.pptx
@@ -1429,7 +1429,7 @@
           <a:lstStyle/>
           <a:p>
             <a:r>
-              <a:t>Passer l'audio du module (section « Je me prépare ») avant d'afficher le texte. Les deux répliques teintées portent l'essentiel : elle décrit précisément, il fait vérifier avant d'appeler.</a:t>
+              <a:t>Passer l'audio du module (section « Je découvre ») avant d'afficher le texte. Les deux répliques teintées portent l'essentiel : elle décrit précisément, il fait vérifier avant d'appeler.</a:t>
             </a:r>
           </a:p>
         </p:txBody>
